--- a/assets/figures-editable/c1-c2/c2-e36.pptx
+++ b/assets/figures-editable/c1-c2/c2-e36.pptx
@@ -7,7 +7,7 @@
   <p:sldIdLst>
     <p:sldId id="256" r:id="rId7"/>
   </p:sldIdLst>
-  <p:sldSz cx="11948160" cy="7924799" type="screen4x3"/>
+  <p:sldSz cx="12191695" cy="6858000" type="screen4x3"/>
   <p:notesSz cx="6858000" cy="9144000"/>
   <p:defaultTextStyle>
     <a:defPPr>
@@ -3098,14 +3098,14 @@
       <p:grpSpPr/>
       <p:sp>
         <p:nvSpPr>
-          <p:cNvPr id="2" name="text1" descr="sci-ppt:C2-E36-001"/>
+          <p:cNvPr id="2" name="C2-E36 text 0" descr="sci-ppt:o000"/>
           <p:cNvSpPr txBox="1"/>
           <p:nvPr/>
         </p:nvSpPr>
         <p:spPr>
           <a:xfrm>
-            <a:off x="316992" y="268224"/>
-            <a:ext cx="11277600" cy="359054"/>
+            <a:off x="274320" y="118872"/>
+            <a:ext cx="11612880" cy="340105"/>
           </a:xfrm>
           <a:prstGeom prst="rect">
             <a:avLst/>
@@ -3114,7 +3114,7 @@
           <a:effectLst/>
         </p:spPr>
         <p:txBody>
-          <a:bodyPr wrap="none" lIns="27432" rIns="27432" tIns="18288" bIns="18288" anchor="ctr">
+          <a:bodyPr wrap="none" lIns="18288" rIns="18288" tIns="18288" bIns="18288" anchor="t">
             <a:spAutoFit/>
           </a:bodyPr>
           <a:lstStyle/>
@@ -3125,35 +3125,139 @@
               </a:spcAft>
             </a:pPr>
             <a:r>
-              <a:rPr sz="1823" b="0" i="0">
+              <a:rPr sz="1900" b="1" i="0">
                 <a:solidFill>
                   <a:srgbClr val="8EDBD4"/>
                 </a:solidFill>
                 <a:latin typeface="Arial"/>
               </a:rPr>
-              <a:t>C2-E36 | Physical-variable diagram</a:t>
-            </a:r>
-          </a:p>
-        </p:txBody>
-      </p:sp>
-      <p:sp>
-        <p:nvSpPr>
-          <p:cNvPr id="3" name="rect2" descr="sci-ppt:C2-E36-002"/>
+              <a:t>C2-E36 · Original phase-energy and velocity-slip formulas</a:t>
+            </a:r>
+          </a:p>
+        </p:txBody>
+      </p:sp>
+      <p:sp>
+        <p:nvSpPr>
+          <p:cNvPr id="3" name="C2-E36 round_rect 1" descr="sci-ppt:o001"/>
           <p:cNvSpPr/>
           <p:nvPr/>
         </p:nvSpPr>
         <p:spPr>
           <a:xfrm>
-            <a:off x="975360" y="1463040"/>
-            <a:ext cx="4267200" cy="2682240"/>
-          </a:xfrm>
-          <a:prstGeom prst="rect">
+            <a:off x="457200" y="1005840"/>
+            <a:ext cx="3657600" cy="4480560"/>
+          </a:xfrm>
+          <a:prstGeom prst="roundRect">
             <a:avLst/>
           </a:prstGeom>
           <a:solidFill>
             <a:srgbClr val="213E4B"/>
           </a:solidFill>
-          <a:ln w="19050">
+          <a:ln w="20320">
+            <a:solidFill>
+              <a:srgbClr val="8EDBD4"/>
+            </a:solidFill>
+          </a:ln>
+          <a:effectLst/>
+        </p:spPr>
+        <p:txBody>
+          <a:bodyPr rtlCol="0" anchor="ctr"/>
+          <a:lstStyle/>
+          <a:p>
+            <a:pPr algn="ctr"/>
+          </a:p>
+        </p:txBody>
+      </p:sp>
+      <p:sp>
+        <p:nvSpPr>
+          <p:cNvPr id="4" name="C2-E36 text 2" descr="sci-ppt:o002"/>
+          <p:cNvSpPr txBox="1"/>
+          <p:nvPr/>
+        </p:nvSpPr>
+        <p:spPr>
+          <a:xfrm>
+            <a:off x="566928" y="1060704"/>
+            <a:ext cx="3438144" cy="254889"/>
+          </a:xfrm>
+          <a:prstGeom prst="rect">
+            <a:avLst/>
+          </a:prstGeom>
+          <a:noFill/>
+          <a:effectLst/>
+        </p:spPr>
+        <p:txBody>
+          <a:bodyPr wrap="none" lIns="18288" rIns="18288" tIns="18288" bIns="18288" anchor="t">
+            <a:spAutoFit/>
+          </a:bodyPr>
+          <a:lstStyle/>
+          <a:p>
+            <a:pPr algn="l">
+              <a:spcAft>
+                <a:spcPts val="0"/>
+              </a:spcAft>
+            </a:pPr>
+            <a:r>
+              <a:rPr sz="1350" b="1" i="0">
+                <a:solidFill>
+                  <a:srgbClr val="8EDBD4"/>
+                </a:solidFill>
+                <a:latin typeface="Arial"/>
+              </a:rPr>
+              <a:t>Interface energy jump</a:t>
+            </a:r>
+          </a:p>
+        </p:txBody>
+      </p:sp>
+      <p:sp>
+        <p:nvSpPr>
+          <p:cNvPr id="5" name="C2-E36 rect 3" descr="sci-ppt:o003"/>
+          <p:cNvSpPr/>
+          <p:nvPr/>
+        </p:nvSpPr>
+        <p:spPr>
+          <a:xfrm>
+            <a:off x="731520" y="1828800"/>
+            <a:ext cx="1463040" cy="2194560"/>
+          </a:xfrm>
+          <a:prstGeom prst="rect">
+            <a:avLst/>
+          </a:prstGeom>
+          <a:solidFill>
+            <a:srgbClr val="1E4A5A"/>
+          </a:solidFill>
+          <a:ln w="12700">
+            <a:solidFill>
+              <a:srgbClr val="2B6678"/>
+            </a:solidFill>
+          </a:ln>
+          <a:effectLst/>
+        </p:spPr>
+        <p:txBody>
+          <a:bodyPr rtlCol="0" anchor="ctr"/>
+          <a:lstStyle/>
+          <a:p>
+            <a:pPr algn="ctr"/>
+          </a:p>
+        </p:txBody>
+      </p:sp>
+      <p:sp>
+        <p:nvSpPr>
+          <p:cNvPr id="6" name="C2-E36 rect 4" descr="sci-ppt:o004"/>
+          <p:cNvSpPr/>
+          <p:nvPr/>
+        </p:nvSpPr>
+        <p:spPr>
+          <a:xfrm>
+            <a:off x="2194560" y="1828800"/>
+            <a:ext cx="1645920" cy="2194560"/>
+          </a:xfrm>
+          <a:prstGeom prst="rect">
+            <a:avLst/>
+          </a:prstGeom>
+          <a:solidFill>
+            <a:srgbClr val="0C1820"/>
+          </a:solidFill>
+          <a:ln w="12700">
             <a:solidFill>
               <a:srgbClr val="B4C7D2"/>
             </a:solidFill>
@@ -3168,133 +3272,45 @@
           </a:p>
         </p:txBody>
       </p:sp>
-      <p:sp>
-        <p:nvSpPr>
-          <p:cNvPr id="4" name="rect3" descr="sci-ppt:C2-E36-003"/>
-          <p:cNvSpPr/>
+      <p:cxnSp>
+        <p:nvCxnSpPr>
+          <p:cNvPr id="7" name="C2-E36 line 5" descr="sci-ppt:o005"/>
+          <p:cNvCxnSpPr/>
           <p:nvPr/>
-        </p:nvSpPr>
-        <p:spPr>
-          <a:xfrm>
-            <a:off x="5242560" y="1463040"/>
-            <a:ext cx="5242560" cy="2682240"/>
-          </a:xfrm>
-          <a:prstGeom prst="rect">
+        </p:nvCxnSpPr>
+        <p:spPr>
+          <a:xfrm>
+            <a:off x="2194560" y="1737360"/>
+            <a:ext cx="0" cy="2377440"/>
+          </a:xfrm>
+          <a:prstGeom prst="line">
             <a:avLst/>
           </a:prstGeom>
-          <a:noFill/>
-          <a:ln w="19050">
+          <a:ln w="38100">
             <a:solidFill>
-              <a:srgbClr val="B4C7D2"/>
+              <a:srgbClr val="F2B880"/>
             </a:solidFill>
           </a:ln>
           <a:effectLst/>
         </p:spPr>
-        <p:txBody>
-          <a:bodyPr rtlCol="0" anchor="ctr"/>
-          <a:lstStyle/>
-          <a:p>
-            <a:pPr algn="ctr"/>
-          </a:p>
-        </p:txBody>
-      </p:sp>
-      <p:sp>
-        <p:nvSpPr>
-          <p:cNvPr id="5" name="text4" descr="sci-ppt:C2-E36-004"/>
-          <p:cNvSpPr txBox="1"/>
-          <p:nvPr/>
-        </p:nvSpPr>
-        <p:spPr>
-          <a:xfrm>
-            <a:off x="2194560" y="1767840"/>
-            <a:ext cx="2438400" cy="434644"/>
-          </a:xfrm>
-          <a:prstGeom prst="rect">
-            <a:avLst/>
-          </a:prstGeom>
-          <a:noFill/>
-          <a:effectLst/>
-        </p:spPr>
-        <p:txBody>
-          <a:bodyPr wrap="none" lIns="27432" rIns="27432" tIns="18288" bIns="18288" anchor="ctr">
-            <a:spAutoFit/>
-          </a:bodyPr>
-          <a:lstStyle/>
-          <a:p>
-            <a:pPr algn="l">
-              <a:spcAft>
-                <a:spcPts val="0"/>
-              </a:spcAft>
-            </a:pPr>
-            <a:r>
-              <a:rPr sz="2208" b="0" i="0">
-                <a:solidFill>
-                  <a:srgbClr val="E7F0F3"/>
-                </a:solidFill>
-                <a:latin typeface="Arial"/>
-              </a:rPr>
-              <a:t>Vapor</a:t>
-            </a:r>
-          </a:p>
-        </p:txBody>
-      </p:sp>
-      <p:sp>
-        <p:nvSpPr>
-          <p:cNvPr id="6" name="text5" descr="sci-ppt:C2-E36-005"/>
-          <p:cNvSpPr txBox="1"/>
-          <p:nvPr/>
-        </p:nvSpPr>
-        <p:spPr>
-          <a:xfrm>
-            <a:off x="7315200" y="1767840"/>
-            <a:ext cx="2438400" cy="434644"/>
-          </a:xfrm>
-          <a:prstGeom prst="rect">
-            <a:avLst/>
-          </a:prstGeom>
-          <a:noFill/>
-          <a:effectLst/>
-        </p:spPr>
-        <p:txBody>
-          <a:bodyPr wrap="none" lIns="27432" rIns="27432" tIns="18288" bIns="18288" anchor="ctr">
-            <a:spAutoFit/>
-          </a:bodyPr>
-          <a:lstStyle/>
-          <a:p>
-            <a:pPr algn="l">
-              <a:spcAft>
-                <a:spcPts val="0"/>
-              </a:spcAft>
-            </a:pPr>
-            <a:r>
-              <a:rPr sz="2208" b="0" i="0">
-                <a:solidFill>
-                  <a:srgbClr val="E7F0F3"/>
-                </a:solidFill>
-                <a:latin typeface="Arial"/>
-              </a:rPr>
-              <a:t>Liquid</a:t>
-            </a:r>
-          </a:p>
-        </p:txBody>
-      </p:sp>
+      </p:cxnSp>
       <p:cxnSp>
         <p:nvCxnSpPr>
-          <p:cNvPr id="7" name="arrow6" descr="sci-ppt:C2-E36-006"/>
+          <p:cNvPr id="8" name="C2-E36 arrow 6" descr="sci-ppt:o006"/>
           <p:cNvCxnSpPr/>
           <p:nvPr/>
         </p:nvCxnSpPr>
         <p:spPr>
-          <a:xfrm flipH="1">
-            <a:off x="3657600" y="2804160"/>
-            <a:ext cx="3779520" cy="0"/>
+          <a:xfrm>
+            <a:off x="914400" y="2926080"/>
+            <a:ext cx="1234440" cy="0"/>
           </a:xfrm>
           <a:prstGeom prst="line">
             <a:avLst/>
           </a:prstGeom>
-          <a:ln w="25400">
+          <a:ln w="38100">
             <a:solidFill>
-              <a:srgbClr val="F6BC77"/>
+              <a:srgbClr val="F28BA0"/>
             </a:solidFill>
             <a:headEnd type="none" w="med" len="med"/>
             <a:tailEnd type="triangle" w="med" len="med"/>
@@ -3302,56 +3318,16 @@
           <a:effectLst/>
         </p:spPr>
       </p:cxnSp>
-      <p:sp>
-        <p:nvSpPr>
-          <p:cNvPr id="8" name="text7" descr="sci-ppt:C2-E36-007"/>
-          <p:cNvSpPr txBox="1"/>
-          <p:nvPr/>
-        </p:nvSpPr>
-        <p:spPr>
-          <a:xfrm>
-            <a:off x="5852160" y="3108960"/>
-            <a:ext cx="4145280" cy="377952"/>
-          </a:xfrm>
-          <a:prstGeom prst="rect">
-            <a:avLst/>
-          </a:prstGeom>
-          <a:noFill/>
-          <a:effectLst/>
-        </p:spPr>
-        <p:txBody>
-          <a:bodyPr wrap="none" lIns="27432" rIns="27432" tIns="18288" bIns="18288" anchor="ctr">
-            <a:spAutoFit/>
-          </a:bodyPr>
-          <a:lstStyle/>
-          <a:p>
-            <a:pPr algn="l">
-              <a:spcAft>
-                <a:spcPts val="0"/>
-              </a:spcAft>
-            </a:pPr>
-            <a:r>
-              <a:rPr sz="1920" b="0" i="0">
-                <a:solidFill>
-                  <a:srgbClr val="F6BC77"/>
-                </a:solidFill>
-                <a:latin typeface="Arial"/>
-              </a:rPr>
-              <a:t>n: liquid → vapor</a:t>
-            </a:r>
-          </a:p>
-        </p:txBody>
-      </p:sp>
       <p:cxnSp>
         <p:nvCxnSpPr>
-          <p:cNvPr id="9" name="arrow8" descr="sci-ppt:C2-E36-008"/>
+          <p:cNvPr id="9" name="C2-E36 arrow 7" descr="sci-ppt:o007"/>
           <p:cNvCxnSpPr/>
           <p:nvPr/>
         </p:nvCxnSpPr>
         <p:spPr>
           <a:xfrm>
-            <a:off x="5242560" y="3779520"/>
-            <a:ext cx="1402080" cy="0"/>
+            <a:off x="2286000" y="2926080"/>
+            <a:ext cx="914400" cy="0"/>
           </a:xfrm>
           <a:prstGeom prst="line">
             <a:avLst/>
@@ -3368,14 +3344,14 @@
       </p:cxnSp>
       <p:sp>
         <p:nvSpPr>
-          <p:cNvPr id="10" name="text9" descr="sci-ppt:C2-E36-009"/>
+          <p:cNvPr id="10" name="C2-E36 text 8" descr="sci-ppt:o008"/>
           <p:cNvSpPr txBox="1"/>
           <p:nvPr/>
         </p:nvSpPr>
         <p:spPr>
           <a:xfrm>
-            <a:off x="5486400" y="4206240"/>
-            <a:ext cx="4267200" cy="340156"/>
+            <a:off x="640080" y="1417320"/>
+            <a:ext cx="1371600" cy="223900"/>
           </a:xfrm>
           <a:prstGeom prst="rect">
             <a:avLst/>
@@ -3384,7 +3360,7 @@
           <a:effectLst/>
         </p:spPr>
         <p:txBody>
-          <a:bodyPr wrap="none" lIns="27432" rIns="27432" tIns="18288" bIns="18288" anchor="ctr">
+          <a:bodyPr wrap="none" lIns="18288" rIns="18288" tIns="18288" bIns="18288" anchor="t">
             <a:spAutoFit/>
           </a:bodyPr>
           <a:lstStyle/>
@@ -3395,27 +3371,107 @@
               </a:spcAft>
             </a:pPr>
             <a:r>
-              <a:rPr sz="1728" b="0" i="0">
+              <a:rPr sz="1150" b="1" i="0">
+                <a:solidFill>
+                  <a:srgbClr val="8EDBD4"/>
+                </a:solidFill>
+                <a:latin typeface="Arial"/>
+              </a:rPr>
+              <a:t>liquid</a:t>
+            </a:r>
+          </a:p>
+        </p:txBody>
+      </p:sp>
+      <p:sp>
+        <p:nvSpPr>
+          <p:cNvPr id="11" name="C2-E36 text 9" descr="sci-ppt:o009"/>
+          <p:cNvSpPr txBox="1"/>
+          <p:nvPr/>
+        </p:nvSpPr>
+        <p:spPr>
+          <a:xfrm>
+            <a:off x="2377440" y="1417320"/>
+            <a:ext cx="1371600" cy="223900"/>
+          </a:xfrm>
+          <a:prstGeom prst="rect">
+            <a:avLst/>
+          </a:prstGeom>
+          <a:noFill/>
+          <a:effectLst/>
+        </p:spPr>
+        <p:txBody>
+          <a:bodyPr wrap="none" lIns="18288" rIns="18288" tIns="18288" bIns="18288" anchor="t">
+            <a:spAutoFit/>
+          </a:bodyPr>
+          <a:lstStyle/>
+          <a:p>
+            <a:pPr algn="l">
+              <a:spcAft>
+                <a:spcPts val="0"/>
+              </a:spcAft>
+            </a:pPr>
+            <a:r>
+              <a:rPr sz="1150" b="1" i="0">
+                <a:solidFill>
+                  <a:srgbClr val="B4C7D2"/>
+                </a:solidFill>
+                <a:latin typeface="Arial"/>
+              </a:rPr>
+              <a:t>vapor</a:t>
+            </a:r>
+          </a:p>
+        </p:txBody>
+      </p:sp>
+      <p:sp>
+        <p:nvSpPr>
+          <p:cNvPr id="12" name="C2-E36 text 10" descr="sci-ppt:o010"/>
+          <p:cNvSpPr txBox="1"/>
+          <p:nvPr/>
+        </p:nvSpPr>
+        <p:spPr>
+          <a:xfrm>
+            <a:off x="594360" y="4206240"/>
+            <a:ext cx="3383280" cy="247142"/>
+          </a:xfrm>
+          <a:prstGeom prst="rect">
+            <a:avLst/>
+          </a:prstGeom>
+          <a:noFill/>
+          <a:effectLst/>
+        </p:spPr>
+        <p:txBody>
+          <a:bodyPr wrap="none" lIns="18288" rIns="18288" tIns="18288" bIns="18288" anchor="t">
+            <a:spAutoFit/>
+          </a:bodyPr>
+          <a:lstStyle/>
+          <a:p>
+            <a:pPr algn="l">
+              <a:spcAft>
+                <a:spcPts val="0"/>
+              </a:spcAft>
+            </a:pPr>
+            <a:r>
+              <a:rPr sz="1300" b="1" i="0">
                 <a:solidFill>
                   <a:srgbClr val="E7F0F3"/>
                 </a:solidFill>
                 <a:latin typeface="Arial"/>
               </a:rPr>
-              <a:t>+e_r, wall motion</a:t>
-            </a:r>
-          </a:p>
-        </p:txBody>
-      </p:sp>
-      <p:sp>
-        <p:nvSpPr>
-          <p:cNvPr id="11" name="text10" descr="sci-ppt:C2-E36-010"/>
+              <a:t>jₛ Lᵥ,s = (qₗ − qᵥ)·n</a:t>
+            </a:r>
+          </a:p>
+        </p:txBody>
+      </p:sp>
+      <p:sp>
+        <p:nvSpPr>
+          <p:cNvPr id="13" name="C2-E36 text 11" descr="sci-ppt:o011"/>
           <p:cNvSpPr txBox="1"/>
           <p:nvPr/>
         </p:nvSpPr>
         <p:spPr>
           <a:xfrm>
-            <a:off x="1219200" y="1036320"/>
-            <a:ext cx="3657600" cy="359054"/>
+            <a:off x="594360" y="4754880"/>
+            <a:ext cx="3383280" cy="223900"/>
           </a:xfrm>
           <a:prstGeom prst="rect">
             <a:avLst/>
@@ -3424,7 +3480,7 @@
           <a:effectLst/>
         </p:spPr>
         <p:txBody>
-          <a:bodyPr wrap="none" lIns="27432" rIns="27432" tIns="18288" bIns="18288" anchor="ctr">
+          <a:bodyPr wrap="none" lIns="18288" rIns="18288" tIns="18288" bIns="18288" anchor="t">
             <a:spAutoFit/>
           </a:bodyPr>
           <a:lstStyle/>
@@ -3435,27 +3491,243 @@
               </a:spcAft>
             </a:pPr>
             <a:r>
-              <a:rPr sz="1823" b="0" i="0">
+              <a:rPr sz="1150" b="0" i="0">
+                <a:solidFill>
+                  <a:srgbClr val="B4C7D2"/>
+                </a:solidFill>
+                <a:latin typeface="Arial"/>
+              </a:rPr>
+              <a:t>unbalanced heat becomes latent heat</a:t>
+            </a:r>
+          </a:p>
+        </p:txBody>
+      </p:sp>
+      <p:sp>
+        <p:nvSpPr>
+          <p:cNvPr id="14" name="C2-E36 round_rect 12" descr="sci-ppt:o012"/>
+          <p:cNvSpPr/>
+          <p:nvPr/>
+        </p:nvSpPr>
+        <p:spPr>
+          <a:xfrm>
+            <a:off x="4297680" y="1005840"/>
+            <a:ext cx="3657600" cy="4480560"/>
+          </a:xfrm>
+          <a:prstGeom prst="roundRect">
+            <a:avLst/>
+          </a:prstGeom>
+          <a:solidFill>
+            <a:srgbClr val="213E4B"/>
+          </a:solidFill>
+          <a:ln w="20320">
+            <a:solidFill>
+              <a:srgbClr val="F2B880"/>
+            </a:solidFill>
+          </a:ln>
+          <a:effectLst/>
+        </p:spPr>
+        <p:txBody>
+          <a:bodyPr rtlCol="0" anchor="ctr"/>
+          <a:lstStyle/>
+          <a:p>
+            <a:pPr algn="ctr"/>
+          </a:p>
+        </p:txBody>
+      </p:sp>
+      <p:sp>
+        <p:nvSpPr>
+          <p:cNvPr id="15" name="C2-E36 text 13" descr="sci-ppt:o013"/>
+          <p:cNvSpPr txBox="1"/>
+          <p:nvPr/>
+        </p:nvSpPr>
+        <p:spPr>
+          <a:xfrm>
+            <a:off x="4407408" y="1060704"/>
+            <a:ext cx="3438144" cy="254889"/>
+          </a:xfrm>
+          <a:prstGeom prst="rect">
+            <a:avLst/>
+          </a:prstGeom>
+          <a:noFill/>
+          <a:effectLst/>
+        </p:spPr>
+        <p:txBody>
+          <a:bodyPr wrap="none" lIns="18288" rIns="18288" tIns="18288" bIns="18288" anchor="t">
+            <a:spAutoFit/>
+          </a:bodyPr>
+          <a:lstStyle/>
+          <a:p>
+            <a:pPr algn="l">
+              <a:spcAft>
+                <a:spcPts val="0"/>
+              </a:spcAft>
+            </a:pPr>
+            <a:r>
+              <a:rPr sz="1350" b="1" i="0">
+                <a:solidFill>
+                  <a:srgbClr val="F2B880"/>
+                </a:solidFill>
+                <a:latin typeface="Arial"/>
+              </a:rPr>
+              <a:t>Bubble ledger</a:t>
+            </a:r>
+          </a:p>
+        </p:txBody>
+      </p:sp>
+      <p:sp>
+        <p:nvSpPr>
+          <p:cNvPr id="16" name="C2-E36 ellipse 14" descr="sci-ppt:o014"/>
+          <p:cNvSpPr/>
+          <p:nvPr/>
+        </p:nvSpPr>
+        <p:spPr>
+          <a:xfrm>
+            <a:off x="5349240" y="2148840"/>
+            <a:ext cx="1554480" cy="1554480"/>
+          </a:xfrm>
+          <a:prstGeom prst="ellipse">
+            <a:avLst/>
+          </a:prstGeom>
+          <a:solidFill>
+            <a:srgbClr val="0C1820"/>
+          </a:solidFill>
+          <a:ln w="30480">
+            <a:solidFill>
+              <a:srgbClr val="F2B880"/>
+            </a:solidFill>
+          </a:ln>
+          <a:effectLst/>
+        </p:spPr>
+        <p:txBody>
+          <a:bodyPr rtlCol="0" anchor="ctr"/>
+          <a:lstStyle/>
+          <a:p>
+            <a:pPr algn="ctr"/>
+          </a:p>
+        </p:txBody>
+      </p:sp>
+      <p:sp>
+        <p:nvSpPr>
+          <p:cNvPr id="17" name="C2-E36 text 15" descr="sci-ppt:o015"/>
+          <p:cNvSpPr txBox="1"/>
+          <p:nvPr/>
+        </p:nvSpPr>
+        <p:spPr>
+          <a:xfrm>
+            <a:off x="5486400" y="2788920"/>
+            <a:ext cx="1280160" cy="278130"/>
+          </a:xfrm>
+          <a:prstGeom prst="rect">
+            <a:avLst/>
+          </a:prstGeom>
+          <a:noFill/>
+          <a:effectLst/>
+        </p:spPr>
+        <p:txBody>
+          <a:bodyPr wrap="none" lIns="18288" rIns="18288" tIns="18288" bIns="18288" anchor="t">
+            <a:spAutoFit/>
+          </a:bodyPr>
+          <a:lstStyle/>
+          <a:p>
+            <a:pPr algn="ctr">
+              <a:spcAft>
+                <a:spcPts val="0"/>
+              </a:spcAft>
+            </a:pPr>
+            <a:r>
+              <a:rPr sz="1500" b="1" i="0">
                 <a:solidFill>
                   <a:srgbClr val="E7F0F3"/>
                 </a:solidFill>
                 <a:latin typeface="Arial"/>
               </a:rPr>
-              <a:t>Interface Gamma</a:t>
-            </a:r>
-          </a:p>
-        </p:txBody>
-      </p:sp>
-      <p:sp>
-        <p:nvSpPr>
-          <p:cNvPr id="12" name="text11" descr="sci-ppt:C2-E36-011"/>
+              <a:t>U_b</a:t>
+            </a:r>
+          </a:p>
+        </p:txBody>
+      </p:sp>
+      <p:cxnSp>
+        <p:nvCxnSpPr>
+          <p:cNvPr id="18" name="C2-E36 arrow 16" descr="sci-ppt:o016"/>
+          <p:cNvCxnSpPr/>
+          <p:nvPr/>
+        </p:nvCxnSpPr>
+        <p:spPr>
+          <a:xfrm>
+            <a:off x="4526280" y="2926080"/>
+            <a:ext cx="777240" cy="0"/>
+          </a:xfrm>
+          <a:prstGeom prst="line">
+            <a:avLst/>
+          </a:prstGeom>
+          <a:ln w="38100">
+            <a:solidFill>
+              <a:srgbClr val="F28BA0"/>
+            </a:solidFill>
+            <a:headEnd type="none" w="med" len="med"/>
+            <a:tailEnd type="triangle" w="med" len="med"/>
+          </a:ln>
+          <a:effectLst/>
+        </p:spPr>
+      </p:cxnSp>
+      <p:cxnSp>
+        <p:nvCxnSpPr>
+          <p:cNvPr id="19" name="C2-E36 arrow 17" descr="sci-ppt:o017"/>
+          <p:cNvCxnSpPr/>
+          <p:nvPr/>
+        </p:nvCxnSpPr>
+        <p:spPr>
+          <a:xfrm flipV="1">
+            <a:off x="6949440" y="1920240"/>
+            <a:ext cx="640080" cy="457200"/>
+          </a:xfrm>
+          <a:prstGeom prst="line">
+            <a:avLst/>
+          </a:prstGeom>
+          <a:ln w="38100">
+            <a:solidFill>
+              <a:srgbClr val="F2B880"/>
+            </a:solidFill>
+            <a:headEnd type="none" w="med" len="med"/>
+            <a:tailEnd type="triangle" w="med" len="med"/>
+          </a:ln>
+          <a:effectLst/>
+        </p:spPr>
+      </p:cxnSp>
+      <p:cxnSp>
+        <p:nvCxnSpPr>
+          <p:cNvPr id="20" name="C2-E36 arrow 18" descr="sci-ppt:o018"/>
+          <p:cNvCxnSpPr/>
+          <p:nvPr/>
+        </p:nvCxnSpPr>
+        <p:spPr>
+          <a:xfrm>
+            <a:off x="6126480" y="1645920"/>
+            <a:ext cx="0" cy="457200"/>
+          </a:xfrm>
+          <a:prstGeom prst="line">
+            <a:avLst/>
+          </a:prstGeom>
+          <a:ln w="38100">
+            <a:solidFill>
+              <a:srgbClr val="8EDBD4"/>
+            </a:solidFill>
+            <a:headEnd type="none" w="med" len="med"/>
+            <a:tailEnd type="triangle" w="med" len="med"/>
+          </a:ln>
+          <a:effectLst/>
+        </p:spPr>
+      </p:cxnSp>
+      <p:sp>
+        <p:nvSpPr>
+          <p:cNvPr id="21" name="C2-E36 text 19" descr="sci-ppt:o019"/>
           <p:cNvSpPr txBox="1"/>
           <p:nvPr/>
         </p:nvSpPr>
         <p:spPr>
           <a:xfrm>
-            <a:off x="365760" y="4974336"/>
-            <a:ext cx="5547360" cy="321259"/>
+            <a:off x="4434840" y="4206240"/>
+            <a:ext cx="3383280" cy="239395"/>
           </a:xfrm>
           <a:prstGeom prst="rect">
             <a:avLst/>
@@ -3464,7 +3736,7 @@
           <a:effectLst/>
         </p:spPr>
         <p:txBody>
-          <a:bodyPr wrap="none" lIns="27432" rIns="27432" tIns="18288" bIns="18288" anchor="ctr">
+          <a:bodyPr wrap="none" lIns="18288" rIns="18288" tIns="18288" bIns="18288" anchor="t">
             <a:spAutoFit/>
           </a:bodyPr>
           <a:lstStyle/>
@@ -3475,27 +3747,27 @@
               </a:spcAft>
             </a:pPr>
             <a:r>
-              <a:rPr sz="1632" b="0" i="0">
+              <a:rPr sz="1250" b="1" i="0">
                 <a:solidFill>
                   <a:srgbClr val="E7F0F3"/>
                 </a:solidFill>
                 <a:latin typeface="Arial"/>
               </a:rPr>
-              <a:t>j_s, L_v,s: phase conversion</a:t>
-            </a:r>
-          </a:p>
-        </p:txBody>
-      </p:sp>
-      <p:sp>
-        <p:nvSpPr>
-          <p:cNvPr id="13" name="text12" descr="sci-ppt:C2-E36-012"/>
+              <a:t>U̇_b = Q̇_b − p_b V̇_b + Σ hᵥ,s ṁᵥ,s</a:t>
+            </a:r>
+          </a:p>
+        </p:txBody>
+      </p:sp>
+      <p:sp>
+        <p:nvSpPr>
+          <p:cNvPr id="22" name="C2-E36 text 20" descr="sci-ppt:o020"/>
           <p:cNvSpPr txBox="1"/>
           <p:nvPr/>
         </p:nvSpPr>
         <p:spPr>
           <a:xfrm>
-            <a:off x="365760" y="5266944"/>
-            <a:ext cx="5547360" cy="321259"/>
+            <a:off x="4434840" y="4846320"/>
+            <a:ext cx="3383280" cy="223900"/>
           </a:xfrm>
           <a:prstGeom prst="rect">
             <a:avLst/>
@@ -3504,7 +3776,7 @@
           <a:effectLst/>
         </p:spPr>
         <p:txBody>
-          <a:bodyPr wrap="none" lIns="27432" rIns="27432" tIns="18288" bIns="18288" anchor="ctr">
+          <a:bodyPr wrap="none" lIns="18288" rIns="18288" tIns="18288" bIns="18288" anchor="t">
             <a:spAutoFit/>
           </a:bodyPr>
           <a:lstStyle/>
@@ -3515,27 +3787,289 @@
               </a:spcAft>
             </a:pPr>
             <a:r>
-              <a:rPr sz="1632" b="0" i="0">
+              <a:rPr sz="1150" b="0" i="0">
+                <a:solidFill>
+                  <a:srgbClr val="B4C7D2"/>
+                </a:solidFill>
+                <a:latin typeface="Arial"/>
+              </a:rPr>
+              <a:t>heat, work and carried enthalpy</a:t>
+            </a:r>
+          </a:p>
+        </p:txBody>
+      </p:sp>
+      <p:sp>
+        <p:nvSpPr>
+          <p:cNvPr id="23" name="C2-E36 round_rect 21" descr="sci-ppt:o021"/>
+          <p:cNvSpPr/>
+          <p:nvPr/>
+        </p:nvSpPr>
+        <p:spPr>
+          <a:xfrm>
+            <a:off x="8138160" y="1005840"/>
+            <a:ext cx="3657600" cy="4480560"/>
+          </a:xfrm>
+          <a:prstGeom prst="roundRect">
+            <a:avLst/>
+          </a:prstGeom>
+          <a:solidFill>
+            <a:srgbClr val="213E4B"/>
+          </a:solidFill>
+          <a:ln w="20320">
+            <a:solidFill>
+              <a:srgbClr val="F28BA0"/>
+            </a:solidFill>
+          </a:ln>
+          <a:effectLst/>
+        </p:spPr>
+        <p:txBody>
+          <a:bodyPr rtlCol="0" anchor="ctr"/>
+          <a:lstStyle/>
+          <a:p>
+            <a:pPr algn="ctr"/>
+          </a:p>
+        </p:txBody>
+      </p:sp>
+      <p:sp>
+        <p:nvSpPr>
+          <p:cNvPr id="24" name="C2-E36 text 22" descr="sci-ppt:o022"/>
+          <p:cNvSpPr txBox="1"/>
+          <p:nvPr/>
+        </p:nvSpPr>
+        <p:spPr>
+          <a:xfrm>
+            <a:off x="8247888" y="1060704"/>
+            <a:ext cx="3438144" cy="254889"/>
+          </a:xfrm>
+          <a:prstGeom prst="rect">
+            <a:avLst/>
+          </a:prstGeom>
+          <a:noFill/>
+          <a:effectLst/>
+        </p:spPr>
+        <p:txBody>
+          <a:bodyPr wrap="none" lIns="18288" rIns="18288" tIns="18288" bIns="18288" anchor="t">
+            <a:spAutoFit/>
+          </a:bodyPr>
+          <a:lstStyle/>
+          <a:p>
+            <a:pPr algn="l">
+              <a:spcAft>
+                <a:spcPts val="0"/>
+              </a:spcAft>
+            </a:pPr>
+            <a:r>
+              <a:rPr sz="1350" b="1" i="0">
+                <a:solidFill>
+                  <a:srgbClr val="F28BA0"/>
+                </a:solidFill>
+                <a:latin typeface="Arial"/>
+              </a:rPr>
+              <a:t>Velocity slip</a:t>
+            </a:r>
+          </a:p>
+        </p:txBody>
+      </p:sp>
+      <p:cxnSp>
+        <p:nvCxnSpPr>
+          <p:cNvPr id="25" name="C2-E36 line 23" descr="sci-ppt:o023"/>
+          <p:cNvCxnSpPr/>
+          <p:nvPr/>
+        </p:nvCxnSpPr>
+        <p:spPr>
+          <a:xfrm flipV="1">
+            <a:off x="8412480" y="1737360"/>
+            <a:ext cx="0" cy="1920240"/>
+          </a:xfrm>
+          <a:prstGeom prst="line">
+            <a:avLst/>
+          </a:prstGeom>
+          <a:ln w="15240">
+            <a:solidFill>
+              <a:srgbClr val="B4C7D2"/>
+            </a:solidFill>
+          </a:ln>
+          <a:effectLst/>
+        </p:spPr>
+      </p:cxnSp>
+      <p:cxnSp>
+        <p:nvCxnSpPr>
+          <p:cNvPr id="26" name="C2-E36 arrow 24" descr="sci-ppt:o024"/>
+          <p:cNvCxnSpPr/>
+          <p:nvPr/>
+        </p:nvCxnSpPr>
+        <p:spPr>
+          <a:xfrm>
+            <a:off x="8503920" y="2468880"/>
+            <a:ext cx="2103120" cy="0"/>
+          </a:xfrm>
+          <a:prstGeom prst="line">
+            <a:avLst/>
+          </a:prstGeom>
+          <a:ln w="44450">
+            <a:solidFill>
+              <a:srgbClr val="F2B880"/>
+            </a:solidFill>
+            <a:headEnd type="none" w="med" len="med"/>
+            <a:tailEnd type="triangle" w="med" len="med"/>
+          </a:ln>
+          <a:effectLst/>
+        </p:spPr>
+      </p:cxnSp>
+      <p:cxnSp>
+        <p:nvCxnSpPr>
+          <p:cNvPr id="27" name="C2-E36 arrow 25" descr="sci-ppt:o025"/>
+          <p:cNvCxnSpPr/>
+          <p:nvPr/>
+        </p:nvCxnSpPr>
+        <p:spPr>
+          <a:xfrm>
+            <a:off x="8503920" y="3108960"/>
+            <a:ext cx="1645920" cy="0"/>
+          </a:xfrm>
+          <a:prstGeom prst="line">
+            <a:avLst/>
+          </a:prstGeom>
+          <a:ln w="44450">
+            <a:solidFill>
+              <a:srgbClr val="8EDBD4"/>
+            </a:solidFill>
+            <a:headEnd type="none" w="med" len="med"/>
+            <a:tailEnd type="triangle" w="med" len="med"/>
+          </a:ln>
+          <a:effectLst/>
+        </p:spPr>
+      </p:cxnSp>
+      <p:sp>
+        <p:nvSpPr>
+          <p:cNvPr id="28" name="C2-E36 text 26" descr="sci-ppt:o026"/>
+          <p:cNvSpPr txBox="1"/>
+          <p:nvPr/>
+        </p:nvSpPr>
+        <p:spPr>
+          <a:xfrm>
+            <a:off x="8549640" y="2011680"/>
+            <a:ext cx="3017520" cy="223900"/>
+          </a:xfrm>
+          <a:prstGeom prst="rect">
+            <a:avLst/>
+          </a:prstGeom>
+          <a:noFill/>
+          <a:effectLst/>
+        </p:spPr>
+        <p:txBody>
+          <a:bodyPr wrap="none" lIns="18288" rIns="18288" tIns="18288" bIns="18288" anchor="t">
+            <a:spAutoFit/>
+          </a:bodyPr>
+          <a:lstStyle/>
+          <a:p>
+            <a:pPr algn="l">
+              <a:spcAft>
+                <a:spcPts val="0"/>
+              </a:spcAft>
+            </a:pPr>
+            <a:r>
+              <a:rPr sz="1150" b="1" i="0">
+                <a:solidFill>
+                  <a:srgbClr val="F2B880"/>
+                </a:solidFill>
+                <a:latin typeface="Arial"/>
+              </a:rPr>
+              <a:t>wall: Ṙ</a:t>
+            </a:r>
+          </a:p>
+        </p:txBody>
+      </p:sp>
+      <p:sp>
+        <p:nvSpPr>
+          <p:cNvPr id="29" name="C2-E36 text 27" descr="sci-ppt:o027"/>
+          <p:cNvSpPr txBox="1"/>
+          <p:nvPr/>
+        </p:nvSpPr>
+        <p:spPr>
+          <a:xfrm>
+            <a:off x="8549640" y="3154680"/>
+            <a:ext cx="3017520" cy="223900"/>
+          </a:xfrm>
+          <a:prstGeom prst="rect">
+            <a:avLst/>
+          </a:prstGeom>
+          <a:noFill/>
+          <a:effectLst/>
+        </p:spPr>
+        <p:txBody>
+          <a:bodyPr wrap="none" lIns="18288" rIns="18288" tIns="18288" bIns="18288" anchor="t">
+            <a:spAutoFit/>
+          </a:bodyPr>
+          <a:lstStyle/>
+          <a:p>
+            <a:pPr algn="l">
+              <a:spcAft>
+                <a:spcPts val="0"/>
+              </a:spcAft>
+            </a:pPr>
+            <a:r>
+              <a:rPr sz="1150" b="1" i="0">
+                <a:solidFill>
+                  <a:srgbClr val="8EDBD4"/>
+                </a:solidFill>
+                <a:latin typeface="Arial"/>
+              </a:rPr>
+              <a:t>liquid: uₗ(R)</a:t>
+            </a:r>
+          </a:p>
+        </p:txBody>
+      </p:sp>
+      <p:sp>
+        <p:nvSpPr>
+          <p:cNvPr id="30" name="C2-E36 text 28" descr="sci-ppt:o028"/>
+          <p:cNvSpPr txBox="1"/>
+          <p:nvPr/>
+        </p:nvSpPr>
+        <p:spPr>
+          <a:xfrm>
+            <a:off x="8275320" y="4206240"/>
+            <a:ext cx="3383280" cy="247142"/>
+          </a:xfrm>
+          <a:prstGeom prst="rect">
+            <a:avLst/>
+          </a:prstGeom>
+          <a:noFill/>
+          <a:effectLst/>
+        </p:spPr>
+        <p:txBody>
+          <a:bodyPr wrap="none" lIns="18288" rIns="18288" tIns="18288" bIns="18288" anchor="t">
+            <a:spAutoFit/>
+          </a:bodyPr>
+          <a:lstStyle/>
+          <a:p>
+            <a:pPr algn="l">
+              <a:spcAft>
+                <a:spcPts val="0"/>
+              </a:spcAft>
+            </a:pPr>
+            <a:r>
+              <a:rPr sz="1300" b="1" i="0">
                 <a:solidFill>
                   <a:srgbClr val="E7F0F3"/>
                 </a:solidFill>
                 <a:latin typeface="Arial"/>
               </a:rPr>
-              <a:t>U_b, Q̇_b: bubble thermal ledger</a:t>
-            </a:r>
-          </a:p>
-        </p:txBody>
-      </p:sp>
-      <p:sp>
-        <p:nvSpPr>
-          <p:cNvPr id="14" name="text13" descr="sci-ppt:C2-E36-013"/>
+              <a:t>uₗ(R) = Ṙ − jₛ / ρₗ</a:t>
+            </a:r>
+          </a:p>
+        </p:txBody>
+      </p:sp>
+      <p:sp>
+        <p:nvSpPr>
+          <p:cNvPr id="31" name="C2-E36 text 29" descr="sci-ppt:o029"/>
           <p:cNvSpPr txBox="1"/>
           <p:nvPr/>
         </p:nvSpPr>
         <p:spPr>
           <a:xfrm>
-            <a:off x="365760" y="5559552"/>
-            <a:ext cx="5547360" cy="321259"/>
+            <a:off x="8275320" y="4754880"/>
+            <a:ext cx="3383280" cy="223900"/>
           </a:xfrm>
           <a:prstGeom prst="rect">
             <a:avLst/>
@@ -3544,7 +4078,7 @@
           <a:effectLst/>
         </p:spPr>
         <p:txBody>
-          <a:bodyPr wrap="none" lIns="27432" rIns="27432" tIns="18288" bIns="18288" anchor="ctr">
+          <a:bodyPr wrap="none" lIns="18288" rIns="18288" tIns="18288" bIns="18288" anchor="t">
             <a:spAutoFit/>
           </a:bodyPr>
           <a:lstStyle/>
@@ -3555,27 +4089,27 @@
               </a:spcAft>
             </a:pPr>
             <a:r>
-              <a:rPr sz="1632" b="0" i="0">
+              <a:rPr sz="1150" b="0" i="0">
                 <a:solidFill>
-                  <a:srgbClr val="E7F0F3"/>
+                  <a:srgbClr val="B4C7D2"/>
                 </a:solidFill>
                 <a:latin typeface="Arial"/>
               </a:rPr>
-              <a:t>h_v,s, ṁ_v,s: transported enthalpy</a:t>
-            </a:r>
-          </a:p>
-        </p:txBody>
-      </p:sp>
-      <p:sp>
-        <p:nvSpPr>
-          <p:cNvPr id="15" name="text14" descr="sci-ppt:C2-E36-014"/>
+              <a:t>evaporation separates them</a:t>
+            </a:r>
+          </a:p>
+        </p:txBody>
+      </p:sp>
+      <p:sp>
+        <p:nvSpPr>
+          <p:cNvPr id="32" name="C2-E36 text 30" descr="sci-ppt:o030"/>
           <p:cNvSpPr txBox="1"/>
           <p:nvPr/>
         </p:nvSpPr>
         <p:spPr>
           <a:xfrm>
-            <a:off x="365760" y="5852160"/>
-            <a:ext cx="5547360" cy="321259"/>
+            <a:off x="457200" y="5669280"/>
+            <a:ext cx="11247120" cy="247142"/>
           </a:xfrm>
           <a:prstGeom prst="rect">
             <a:avLst/>
@@ -3584,7 +4118,7 @@
           <a:effectLst/>
         </p:spPr>
         <p:txBody>
-          <a:bodyPr wrap="none" lIns="27432" rIns="27432" tIns="18288" bIns="18288" anchor="ctr">
+          <a:bodyPr wrap="none" lIns="18288" rIns="18288" tIns="18288" bIns="18288" anchor="t">
             <a:spAutoFit/>
           </a:bodyPr>
           <a:lstStyle/>
@@ -3595,27 +4129,27 @@
               </a:spcAft>
             </a:pPr>
             <a:r>
-              <a:rPr sz="1632" b="0" i="0">
+              <a:rPr sz="1300" b="0" i="0">
                 <a:solidFill>
-                  <a:srgbClr val="E7F0F3"/>
+                  <a:srgbClr val="F2B880"/>
                 </a:solidFill>
                 <a:latin typeface="Arial"/>
               </a:rPr>
-              <a:t>ρ_l: adjacent liquid density</a:t>
-            </a:r>
-          </a:p>
-        </p:txBody>
-      </p:sp>
-      <p:sp>
-        <p:nvSpPr>
-          <p:cNvPr id="16" name="text15" descr="sci-ppt:C2-E36-015"/>
+              <a:t>Conserved energy and mass at the interface prevent unlimited vapor and double-counted latent heat.</a:t>
+            </a:r>
+          </a:p>
+        </p:txBody>
+      </p:sp>
+      <p:sp>
+        <p:nvSpPr>
+          <p:cNvPr id="33" name="C2-E36 text 31" descr="sci-ppt:o031"/>
           <p:cNvSpPr txBox="1"/>
           <p:nvPr/>
         </p:nvSpPr>
         <p:spPr>
           <a:xfrm>
-            <a:off x="6156960" y="4974336"/>
-            <a:ext cx="5547360" cy="321259"/>
+            <a:off x="320040" y="6510528"/>
+            <a:ext cx="11521440" cy="200660"/>
           </a:xfrm>
           <a:prstGeom prst="rect">
             <a:avLst/>
@@ -3624,7 +4158,7 @@
           <a:effectLst/>
         </p:spPr>
         <p:txBody>
-          <a:bodyPr wrap="none" lIns="27432" rIns="27432" tIns="18288" bIns="18288" anchor="ctr">
+          <a:bodyPr wrap="none" lIns="18288" rIns="18288" tIns="18288" bIns="18288" anchor="t">
             <a:spAutoFit/>
           </a:bodyPr>
           <a:lstStyle/>
@@ -3635,213 +4169,13 @@
               </a:spcAft>
             </a:pPr>
             <a:r>
-              <a:rPr sz="1632" b="0" i="0">
-                <a:solidFill>
-                  <a:srgbClr val="E7F0F3"/>
-                </a:solidFill>
-                <a:latin typeface="Arial"/>
-              </a:rPr>
-              <a:t>q_l, q_v, n: heat jump signs</a:t>
-            </a:r>
-          </a:p>
-        </p:txBody>
-      </p:sp>
-      <p:sp>
-        <p:nvSpPr>
-          <p:cNvPr id="17" name="text16" descr="sci-ppt:C2-E36-016"/>
-          <p:cNvSpPr txBox="1"/>
-          <p:nvPr/>
-        </p:nvSpPr>
-        <p:spPr>
-          <a:xfrm>
-            <a:off x="6156960" y="5266944"/>
-            <a:ext cx="5547360" cy="321259"/>
-          </a:xfrm>
-          <a:prstGeom prst="rect">
-            <a:avLst/>
-          </a:prstGeom>
-          <a:noFill/>
-          <a:effectLst/>
-        </p:spPr>
-        <p:txBody>
-          <a:bodyPr wrap="none" lIns="27432" rIns="27432" tIns="18288" bIns="18288" anchor="ctr">
-            <a:spAutoFit/>
-          </a:bodyPr>
-          <a:lstStyle/>
-          <a:p>
-            <a:pPr algn="l">
-              <a:spcAft>
-                <a:spcPts val="0"/>
-              </a:spcAft>
-            </a:pPr>
-            <a:r>
-              <a:rPr sz="1632" b="0" i="0">
-                <a:solidFill>
-                  <a:srgbClr val="E7F0F3"/>
-                </a:solidFill>
-                <a:latin typeface="Arial"/>
-              </a:rPr>
-              <a:t>p_b V̇_b: pressure work</a:t>
-            </a:r>
-          </a:p>
-        </p:txBody>
-      </p:sp>
-      <p:sp>
-        <p:nvSpPr>
-          <p:cNvPr id="18" name="text17" descr="sci-ppt:C2-E36-017"/>
-          <p:cNvSpPr txBox="1"/>
-          <p:nvPr/>
-        </p:nvSpPr>
-        <p:spPr>
-          <a:xfrm>
-            <a:off x="6156960" y="5559552"/>
-            <a:ext cx="5547360" cy="321259"/>
-          </a:xfrm>
-          <a:prstGeom prst="rect">
-            <a:avLst/>
-          </a:prstGeom>
-          <a:noFill/>
-          <a:effectLst/>
-        </p:spPr>
-        <p:txBody>
-          <a:bodyPr wrap="none" lIns="27432" rIns="27432" tIns="18288" bIns="18288" anchor="ctr">
-            <a:spAutoFit/>
-          </a:bodyPr>
-          <a:lstStyle/>
-          <a:p>
-            <a:pPr algn="l">
-              <a:spcAft>
-                <a:spcPts val="0"/>
-              </a:spcAft>
-            </a:pPr>
-            <a:r>
-              <a:rPr sz="1632" b="0" i="0">
-                <a:solidFill>
-                  <a:srgbClr val="E7F0F3"/>
-                </a:solidFill>
-                <a:latin typeface="Arial"/>
-              </a:rPr>
-              <a:t>R, Ṙ, u_l(R): moving interface</a:t>
-            </a:r>
-          </a:p>
-        </p:txBody>
-      </p:sp>
-      <p:sp>
-        <p:nvSpPr>
-          <p:cNvPr id="19" name="text18" descr="sci-ppt:C2-E36-018"/>
-          <p:cNvSpPr txBox="1"/>
-          <p:nvPr/>
-        </p:nvSpPr>
-        <p:spPr>
-          <a:xfrm>
-            <a:off x="6156960" y="5852160"/>
-            <a:ext cx="5547360" cy="321259"/>
-          </a:xfrm>
-          <a:prstGeom prst="rect">
-            <a:avLst/>
-          </a:prstGeom>
-          <a:noFill/>
-          <a:effectLst/>
-        </p:spPr>
-        <p:txBody>
-          <a:bodyPr wrap="none" lIns="27432" rIns="27432" tIns="18288" bIns="18288" anchor="ctr">
-            <a:spAutoFit/>
-          </a:bodyPr>
-          <a:lstStyle/>
-          <a:p>
-            <a:pPr algn="l">
-              <a:spcAft>
-                <a:spcPts val="0"/>
-              </a:spcAft>
-            </a:pPr>
-            <a:r>
-              <a:rPr sz="1632" b="0" i="0">
-                <a:solidFill>
-                  <a:srgbClr val="E7F0F3"/>
-                </a:solidFill>
-                <a:latin typeface="Arial"/>
-              </a:rPr>
-              <a:t>s: species index</a:t>
-            </a:r>
-          </a:p>
-        </p:txBody>
-      </p:sp>
-      <p:sp>
-        <p:nvSpPr>
-          <p:cNvPr id="20" name="text19" descr="sci-ppt:C2-E36-019"/>
-          <p:cNvSpPr txBox="1"/>
-          <p:nvPr/>
-        </p:nvSpPr>
-        <p:spPr>
-          <a:xfrm>
-            <a:off x="365760" y="6339840"/>
-            <a:ext cx="11277600" cy="302361"/>
-          </a:xfrm>
-          <a:prstGeom prst="rect">
-            <a:avLst/>
-          </a:prstGeom>
-          <a:noFill/>
-          <a:effectLst/>
-        </p:spPr>
-        <p:txBody>
-          <a:bodyPr wrap="none" lIns="27432" rIns="27432" tIns="18288" bIns="18288" anchor="ctr">
-            <a:spAutoFit/>
-          </a:bodyPr>
-          <a:lstStyle/>
-          <a:p>
-            <a:pPr algn="l">
-              <a:spcAft>
-                <a:spcPts val="0"/>
-              </a:spcAft>
-            </a:pPr>
-            <a:r>
-              <a:rPr sz="1536" b="0" i="0">
+              <a:rPr sz="1000" b="0" i="0">
                 <a:solidFill>
                   <a:srgbClr val="B4C7D2"/>
                 </a:solidFill>
                 <a:latin typeface="Arial"/>
               </a:rPr>
-              <a:t>Latent conversion is already included consistently in phase and enthalpy balances</a:t>
-            </a:r>
-          </a:p>
-        </p:txBody>
-      </p:sp>
-      <p:sp>
-        <p:nvSpPr>
-          <p:cNvPr id="21" name="text20" descr="sci-ppt:C2-E36-020"/>
-          <p:cNvSpPr txBox="1"/>
-          <p:nvPr/>
-        </p:nvSpPr>
-        <p:spPr>
-          <a:xfrm>
-            <a:off x="365760" y="6632448"/>
-            <a:ext cx="11277600" cy="302361"/>
-          </a:xfrm>
-          <a:prstGeom prst="rect">
-            <a:avLst/>
-          </a:prstGeom>
-          <a:noFill/>
-          <a:effectLst/>
-        </p:spPr>
-        <p:txBody>
-          <a:bodyPr wrap="none" lIns="27432" rIns="27432" tIns="18288" bIns="18288" anchor="ctr">
-            <a:spAutoFit/>
-          </a:bodyPr>
-          <a:lstStyle/>
-          <a:p>
-            <a:pPr algn="l">
-              <a:spcAft>
-                <a:spcPts val="0"/>
-              </a:spcAft>
-            </a:pPr>
-            <a:r>
-              <a:rPr sz="1536" b="0" i="0">
-                <a:solidFill>
-                  <a:srgbClr val="B4C7D2"/>
-                </a:solidFill>
-                <a:latin typeface="Arial"/>
-              </a:rPr>
-              <a:t>Evaporation and condensation have opposite signs</a:t>
+              <a:t>Reference formulas of Defence 4: Eqs. C2-E20, E21, E22.</a:t>
             </a:r>
           </a:p>
         </p:txBody>
